--- a/stage2_intermediate/01_feature_engineering/Lecture-6-Feature-Engineering.pptx
+++ b/stage2_intermediate/01_feature_engineering/Lecture-6-Feature-Engineering.pptx
@@ -8312,6 +8312,9 @@
           <a:lstStyle/>
           <a:p>
             <a:r>
+              <a:rPr>
+                <a:latin typeface="Calibri"/>
+              </a:rPr>
               <a:t>AI Basic Training</a:t>
             </a:r>
           </a:p>
@@ -8333,6 +8336,9 @@
           <a:lstStyle/>
           <a:p>
             <a:r>
+              <a:rPr>
+                <a:latin typeface="Calibri"/>
+              </a:rPr>
               <a:t>Lesson 2.1  |  Stage 2: Intermediate ML</a:t>
             </a:r>
           </a:p>
@@ -8354,6 +8360,9 @@
           <a:lstStyle/>
           <a:p>
             <a:r>
+              <a:rPr b="1">
+                <a:latin typeface="Calibri"/>
+              </a:rPr>
               <a:t>Feature Engineering</a:t>
             </a:r>
           </a:p>
@@ -8375,6 +8384,9 @@
           <a:lstStyle/>
           <a:p>
             <a:r>
+              <a:rPr>
+                <a:latin typeface="Calibri"/>
+              </a:rPr>
               <a:t>Turning Raw Security Logs into ML-Ready Features</a:t>
             </a:r>
           </a:p>
@@ -8414,6 +8426,9 @@
           <a:lstStyle/>
           <a:p>
             <a:r>
+              <a:rPr b="1">
+                <a:latin typeface="Calibri"/>
+              </a:rPr>
               <a:t>Five Steps from Raw Logs to Model Input</a:t>
             </a:r>
           </a:p>
@@ -8477,6 +8492,9 @@
           <a:lstStyle/>
           <a:p>
             <a:r>
+              <a:rPr b="1">
+                <a:latin typeface="Calibri"/>
+              </a:rPr>
               <a:t>Scaling - Why and How</a:t>
             </a:r>
           </a:p>
@@ -8498,61 +8516,81 @@
           <a:lstStyle/>
           <a:p>
             <a:r>
-              <a:rPr sz="1500"/>
+              <a:rPr sz="1500">
+                <a:latin typeface="Calibri"/>
+              </a:rPr>
               <a:t>Many algorithms are sensitive to feature scale:</a:t>
             </a:r>
           </a:p>
           <a:p>
             <a:r>
-              <a:rPr sz="1500"/>
+              <a:rPr sz="1500">
+                <a:latin typeface="Calibri"/>
+              </a:rPr>
               <a:t>  bytes_sent ranges 0 - 1,000,000</a:t>
             </a:r>
           </a:p>
           <a:p>
             <a:r>
-              <a:rPr sz="1500"/>
+              <a:rPr sz="1500">
+                <a:latin typeface="Calibri"/>
+              </a:rPr>
               <a:t>  duration ranges 0 - 300</a:t>
             </a:r>
           </a:p>
           <a:p>
             <a:r>
-              <a:rPr sz="1500"/>
+              <a:rPr sz="1500">
+                <a:latin typeface="Calibri"/>
+              </a:rPr>
               <a:t/>
             </a:r>
           </a:p>
           <a:p>
             <a:r>
-              <a:rPr sz="1500"/>
+              <a:rPr sz="1500">
+                <a:latin typeface="Calibri"/>
+              </a:rPr>
               <a:t>StandardScaler: mean=0, std=1 (most common)</a:t>
             </a:r>
           </a:p>
           <a:p>
             <a:r>
-              <a:rPr sz="1500"/>
+              <a:rPr sz="1500">
+                <a:latin typeface="Calibri"/>
+              </a:rPr>
               <a:t>MinMaxScaler: range [0, 1]</a:t>
             </a:r>
           </a:p>
           <a:p>
             <a:r>
-              <a:rPr sz="1500"/>
+              <a:rPr sz="1500">
+                <a:latin typeface="Calibri"/>
+              </a:rPr>
               <a:t/>
             </a:r>
           </a:p>
           <a:p>
             <a:r>
-              <a:rPr sz="1500"/>
+              <a:rPr sz="1500">
+                <a:latin typeface="Calibri"/>
+              </a:rPr>
               <a:t>Critical rule: fit on training data only</a:t>
             </a:r>
           </a:p>
           <a:p>
             <a:r>
-              <a:rPr sz="1500"/>
+              <a:rPr sz="1500">
+                <a:latin typeface="Calibri"/>
+              </a:rPr>
               <a:t>  scaler.fit_transform(X_train)</a:t>
             </a:r>
           </a:p>
           <a:p>
             <a:r>
-              <a:rPr sz="1500"/>
+              <a:rPr sz="1500">
+                <a:latin typeface="Calibri"/>
+              </a:rPr>
               <a:t>  scaler.transform(X_test)   # never fit on test!</a:t>
             </a:r>
           </a:p>
@@ -8592,11 +8630,17 @@
           <a:lstStyle/>
           <a:p>
             <a:r>
+              <a:rPr b="1">
+                <a:latin typeface="Calibri"/>
+              </a:rPr>
               <a:t>Feature Selection</a:t>
             </a:r>
           </a:p>
           <a:p>
             <a:r>
+              <a:rPr b="1">
+                <a:latin typeface="Calibri"/>
+              </a:rPr>
               <a:t>and Validation</a:t>
             </a:r>
           </a:p>
@@ -8618,6 +8662,9 @@
           <a:lstStyle/>
           <a:p>
             <a:r>
+              <a:rPr b="1">
+                <a:latin typeface="Calibri"/>
+              </a:rPr>
               <a:t>04</a:t>
             </a:r>
           </a:p>
@@ -8657,6 +8704,9 @@
           <a:lstStyle/>
           <a:p>
             <a:r>
+              <a:rPr b="1">
+                <a:latin typeface="Calibri"/>
+              </a:rPr>
               <a:t>Correlation Matrix - Find Redundant Features</a:t>
             </a:r>
           </a:p>
@@ -8720,6 +8770,9 @@
           <a:lstStyle/>
           <a:p>
             <a:r>
+              <a:rPr>
+                <a:latin typeface="Calibri"/>
+              </a:rPr>
               <a:t/>
             </a:r>
           </a:p>
@@ -8741,43 +8794,57 @@
           <a:lstStyle/>
           <a:p>
             <a:r>
-              <a:rPr sz="1400"/>
+              <a:rPr sz="1400">
+                <a:latin typeface="Calibri"/>
+              </a:rPr>
               <a:t>Random feature addition</a:t>
             </a:r>
           </a:p>
           <a:p>
             <a:r>
-              <a:rPr sz="1400"/>
+              <a:rPr sz="1400">
+                <a:latin typeface="Calibri"/>
+              </a:rPr>
               <a:t>hurts performance.</a:t>
             </a:r>
           </a:p>
           <a:p>
             <a:r>
-              <a:rPr sz="1400"/>
+              <a:rPr sz="1400">
+                <a:latin typeface="Calibri"/>
+              </a:rPr>
               <a:t/>
             </a:r>
           </a:p>
           <a:p>
             <a:r>
-              <a:rPr sz="1400"/>
+              <a:rPr sz="1400">
+                <a:latin typeface="Calibri"/>
+              </a:rPr>
               <a:t>More features is not</a:t>
             </a:r>
           </a:p>
           <a:p>
             <a:r>
-              <a:rPr sz="1400"/>
+              <a:rPr sz="1400">
+                <a:latin typeface="Calibri"/>
+              </a:rPr>
               <a:t>always better -</a:t>
             </a:r>
           </a:p>
           <a:p>
             <a:r>
-              <a:rPr sz="1400"/>
+              <a:rPr sz="1400">
+                <a:latin typeface="Calibri"/>
+              </a:rPr>
               <a:t>this is the curse</a:t>
             </a:r>
           </a:p>
           <a:p>
             <a:r>
-              <a:rPr sz="1400"/>
+              <a:rPr sz="1400">
+                <a:latin typeface="Calibri"/>
+              </a:rPr>
               <a:t>of dimensionality.</a:t>
             </a:r>
           </a:p>
@@ -8799,6 +8866,9 @@
           <a:lstStyle/>
           <a:p>
             <a:r>
+              <a:rPr b="1">
+                <a:latin typeface="Calibri"/>
+              </a:rPr>
               <a:t>The Golden Rule of Feature Engineering</a:t>
             </a:r>
           </a:p>
@@ -8820,61 +8890,81 @@
           <a:lstStyle/>
           <a:p>
             <a:r>
-              <a:rPr sz="1400"/>
+              <a:rPr sz="1400">
+                <a:latin typeface="Calibri"/>
+              </a:rPr>
               <a:t>Every feature is a hypothesis:</a:t>
             </a:r>
           </a:p>
           <a:p>
             <a:r>
-              <a:rPr sz="1400"/>
+              <a:rPr sz="1400">
+                <a:latin typeface="Calibri"/>
+              </a:rPr>
               <a:t>  'This signal distinguishes attack</a:t>
             </a:r>
           </a:p>
           <a:p>
             <a:r>
-              <a:rPr sz="1400"/>
+              <a:rPr sz="1400">
+                <a:latin typeface="Calibri"/>
+              </a:rPr>
               <a:t>   from normal traffic'</a:t>
             </a:r>
           </a:p>
           <a:p>
             <a:r>
-              <a:rPr sz="1400"/>
+              <a:rPr sz="1400">
+                <a:latin typeface="Calibri"/>
+              </a:rPr>
               <a:t/>
             </a:r>
           </a:p>
           <a:p>
             <a:r>
-              <a:rPr sz="1400"/>
+              <a:rPr sz="1400">
+                <a:latin typeface="Calibri"/>
+              </a:rPr>
               <a:t>Remove features that:</a:t>
             </a:r>
           </a:p>
           <a:p>
             <a:r>
-              <a:rPr sz="1400"/>
+              <a:rPr sz="1400">
+                <a:latin typeface="Calibri"/>
+              </a:rPr>
               <a:t>  Are highly correlated (redundant)</a:t>
             </a:r>
           </a:p>
           <a:p>
             <a:r>
-              <a:rPr sz="1400"/>
+              <a:rPr sz="1400">
+                <a:latin typeface="Calibri"/>
+              </a:rPr>
               <a:t>  Have near-zero variance</a:t>
             </a:r>
           </a:p>
           <a:p>
             <a:r>
-              <a:rPr sz="1400"/>
+              <a:rPr sz="1400">
+                <a:latin typeface="Calibri"/>
+              </a:rPr>
               <a:t>  Don't correlate with the label</a:t>
             </a:r>
           </a:p>
           <a:p>
             <a:r>
-              <a:rPr sz="1400"/>
+              <a:rPr sz="1400">
+                <a:latin typeface="Calibri"/>
+              </a:rPr>
               <a:t/>
             </a:r>
           </a:p>
           <a:p>
             <a:r>
-              <a:rPr sz="1400"/>
+              <a:rPr sz="1400">
+                <a:latin typeface="Calibri"/>
+              </a:rPr>
               <a:t>Use tree-based feature importance</a:t>
             </a:r>
           </a:p>
@@ -8914,11 +9004,17 @@
           <a:lstStyle/>
           <a:p>
             <a:r>
+              <a:rPr b="1">
+                <a:latin typeface="Calibri"/>
+              </a:rPr>
               <a:t>Impact and</a:t>
             </a:r>
           </a:p>
           <a:p>
             <a:r>
+              <a:rPr b="1">
+                <a:latin typeface="Calibri"/>
+              </a:rPr>
               <a:t>Next Steps</a:t>
             </a:r>
           </a:p>
@@ -8940,6 +9036,9 @@
           <a:lstStyle/>
           <a:p>
             <a:r>
+              <a:rPr b="1">
+                <a:latin typeface="Calibri"/>
+              </a:rPr>
               <a:t>05</a:t>
             </a:r>
           </a:p>
@@ -8979,6 +9078,9 @@
           <a:lstStyle/>
           <a:p>
             <a:r>
+              <a:rPr b="1">
+                <a:latin typeface="Calibri"/>
+              </a:rPr>
               <a:t>Feature Engineering Drives Model Performance</a:t>
             </a:r>
           </a:p>
@@ -9042,6 +9144,9 @@
           <a:lstStyle/>
           <a:p>
             <a:r>
+              <a:rPr b="1">
+                <a:latin typeface="Calibri"/>
+              </a:rPr>
               <a:t>Workshop: 4 Hands-On Exercises</a:t>
             </a:r>
           </a:p>
@@ -9063,37 +9168,49 @@
           <a:lstStyle/>
           <a:p>
             <a:r>
-              <a:rPr sz="1600"/>
+              <a:rPr sz="1600">
+                <a:latin typeface="Calibri"/>
+              </a:rPr>
               <a:t>Exercise 1:  Why raw logs fail - see sklearn reject string data</a:t>
             </a:r>
           </a:p>
           <a:p>
             <a:r>
-              <a:rPr sz="1600"/>
+              <a:rPr sz="1600">
+                <a:latin typeface="Calibri"/>
+              </a:rPr>
               <a:t>Exercise 2:  Numeric extraction - bytes/s, packet rate, port risk</a:t>
             </a:r>
           </a:p>
           <a:p>
             <a:r>
-              <a:rPr sz="1600"/>
+              <a:rPr sz="1600">
+                <a:latin typeface="Calibri"/>
+              </a:rPr>
               <a:t>Exercise 3:  Categorical encoding - one-hot, LabelEncoder, dummy trap</a:t>
             </a:r>
           </a:p>
           <a:p>
             <a:r>
-              <a:rPr sz="1600"/>
+              <a:rPr sz="1600">
+                <a:latin typeface="Calibri"/>
+              </a:rPr>
               <a:t>Exercise 4:  Scaling and validation - StandardScaler, fit on train only</a:t>
             </a:r>
           </a:p>
           <a:p>
             <a:r>
-              <a:rPr sz="1600"/>
+              <a:rPr sz="1600">
+                <a:latin typeface="Calibri"/>
+              </a:rPr>
               <a:t/>
             </a:r>
           </a:p>
           <a:p>
             <a:r>
-              <a:rPr sz="1600"/>
+              <a:rPr sz="1600">
+                <a:latin typeface="Calibri"/>
+              </a:rPr>
               <a:t>Each exercise: lecture.md (concept) + handson.md (build it yourself)</a:t>
             </a:r>
           </a:p>
@@ -9133,37 +9250,49 @@
           <a:lstStyle/>
           <a:p>
             <a:r>
-              <a:rPr sz="1500"/>
+              <a:rPr sz="1500">
+                <a:latin typeface="Calibri"/>
+              </a:rPr>
               <a:t>Raw logs are unusable - sklearn needs a numerical matrix</a:t>
             </a:r>
           </a:p>
           <a:p>
             <a:r>
-              <a:rPr sz="1500"/>
+              <a:rPr sz="1500">
+                <a:latin typeface="Calibri"/>
+              </a:rPr>
               <a:t>Five feature types: time, aggregation, ratio, categorical, statistical</a:t>
             </a:r>
           </a:p>
           <a:p>
             <a:r>
-              <a:rPr sz="1500"/>
+              <a:rPr sz="1500">
+                <a:latin typeface="Calibri"/>
+              </a:rPr>
               <a:t>Every feature is a hypothesis about what makes attacks different</a:t>
             </a:r>
           </a:p>
           <a:p>
             <a:r>
-              <a:rPr sz="1500"/>
+              <a:rPr sz="1500">
+                <a:latin typeface="Calibri"/>
+              </a:rPr>
               <a:t>Always scale features - fit on training data only</a:t>
             </a:r>
           </a:p>
           <a:p>
             <a:r>
-              <a:rPr sz="1500"/>
+              <a:rPr sz="1500">
+                <a:latin typeface="Calibri"/>
+              </a:rPr>
               <a:t>Remove redundant features (correlation, variance, importance)</a:t>
             </a:r>
           </a:p>
           <a:p>
             <a:r>
-              <a:rPr sz="1500"/>
+              <a:rPr sz="1500">
+                <a:latin typeface="Calibri"/>
+              </a:rPr>
               <a:t>Next: Random Forests - feed engineered features into a powerful ensemble</a:t>
             </a:r>
           </a:p>
@@ -9185,11 +9314,17 @@
           <a:lstStyle/>
           <a:p>
             <a:r>
+              <a:rPr b="1">
+                <a:latin typeface="Calibri"/>
+              </a:rPr>
               <a:t>Key</a:t>
             </a:r>
           </a:p>
           <a:p>
             <a:r>
+              <a:rPr b="1">
+                <a:latin typeface="Calibri"/>
+              </a:rPr>
               <a:t>Takeaways</a:t>
             </a:r>
           </a:p>
@@ -9229,6 +9364,9 @@
           <a:lstStyle/>
           <a:p>
             <a:r>
+              <a:rPr>
+                <a:latin typeface="Calibri"/>
+              </a:rPr>
               <a:t>Next:  Lesson 2.2 - Random Forests</a:t>
             </a:r>
           </a:p>
@@ -9250,6 +9388,9 @@
           <a:lstStyle/>
           <a:p>
             <a:r>
+              <a:rPr b="1">
+                <a:latin typeface="Calibri"/>
+              </a:rPr>
               <a:t>Feature Engineering</a:t>
             </a:r>
           </a:p>
@@ -9289,31 +9430,41 @@
           <a:lstStyle/>
           <a:p>
             <a:r>
-              <a:rPr sz="1600"/>
+              <a:rPr sz="1600">
+                <a:latin typeface="Calibri"/>
+              </a:rPr>
               <a:t>Why raw logs fail - sklearn needs numbers</a:t>
             </a:r>
           </a:p>
           <a:p>
             <a:r>
-              <a:rPr sz="1600"/>
+              <a:rPr sz="1600">
+                <a:latin typeface="Calibri"/>
+              </a:rPr>
               <a:t>Five types of features to extract from security data</a:t>
             </a:r>
           </a:p>
           <a:p>
             <a:r>
-              <a:rPr sz="1600"/>
+              <a:rPr sz="1600">
+                <a:latin typeface="Calibri"/>
+              </a:rPr>
               <a:t>The feature engineering pipeline</a:t>
             </a:r>
           </a:p>
           <a:p>
             <a:r>
-              <a:rPr sz="1600"/>
+              <a:rPr sz="1600">
+                <a:latin typeface="Calibri"/>
+              </a:rPr>
               <a:t>Feature selection - removing noise and redundancy</a:t>
             </a:r>
           </a:p>
           <a:p>
             <a:r>
-              <a:rPr sz="1600"/>
+              <a:rPr sz="1600">
+                <a:latin typeface="Calibri"/>
+              </a:rPr>
               <a:t>Impact on model performance</a:t>
             </a:r>
           </a:p>
@@ -9335,6 +9486,9 @@
           <a:lstStyle/>
           <a:p>
             <a:r>
+              <a:rPr b="1">
+                <a:latin typeface="Calibri"/>
+              </a:rPr>
               <a:t>What We'll Cover</a:t>
             </a:r>
           </a:p>
@@ -9374,11 +9528,17 @@
           <a:lstStyle/>
           <a:p>
             <a:r>
+              <a:rPr b="1">
+                <a:latin typeface="Calibri"/>
+              </a:rPr>
               <a:t>Why Raw</a:t>
             </a:r>
           </a:p>
           <a:p>
             <a:r>
+              <a:rPr b="1">
+                <a:latin typeface="Calibri"/>
+              </a:rPr>
               <a:t>Logs Fail</a:t>
             </a:r>
           </a:p>
@@ -9400,6 +9560,9 @@
           <a:lstStyle/>
           <a:p>
             <a:r>
+              <a:rPr b="1">
+                <a:latin typeface="Calibri"/>
+              </a:rPr>
               <a:t>01</a:t>
             </a:r>
           </a:p>
@@ -9439,6 +9602,9 @@
           <a:lstStyle/>
           <a:p>
             <a:r>
+              <a:rPr b="1">
+                <a:latin typeface="Calibri"/>
+              </a:rPr>
               <a:t>Raw Data vs Engineered Features</a:t>
             </a:r>
           </a:p>
@@ -9502,6 +9668,9 @@
           <a:lstStyle/>
           <a:p>
             <a:r>
+              <a:rPr>
+                <a:latin typeface="Calibri"/>
+              </a:rPr>
               <a:t/>
             </a:r>
           </a:p>
@@ -9523,37 +9692,49 @@
           <a:lstStyle/>
           <a:p>
             <a:r>
-              <a:rPr sz="1400"/>
+              <a:rPr sz="1400">
+                <a:latin typeface="Calibri"/>
+              </a:rPr>
               <a:t>Feature engineering is often</a:t>
             </a:r>
           </a:p>
           <a:p>
             <a:r>
-              <a:rPr sz="1400"/>
+              <a:rPr sz="1400">
+                <a:latin typeface="Calibri"/>
+              </a:rPr>
               <a:t>where the most value comes</a:t>
             </a:r>
           </a:p>
           <a:p>
             <a:r>
-              <a:rPr sz="1400"/>
+              <a:rPr sz="1400">
+                <a:latin typeface="Calibri"/>
+              </a:rPr>
               <a:t>from in a real ML project.</a:t>
             </a:r>
           </a:p>
           <a:p>
             <a:r>
-              <a:rPr sz="1400"/>
+              <a:rPr sz="1400">
+                <a:latin typeface="Calibri"/>
+              </a:rPr>
               <a:t/>
             </a:r>
           </a:p>
           <a:p>
             <a:r>
-              <a:rPr sz="1400"/>
+              <a:rPr sz="1400">
+                <a:latin typeface="Calibri"/>
+              </a:rPr>
               <a:t>80% of the work, 80% of</a:t>
             </a:r>
           </a:p>
           <a:p>
             <a:r>
-              <a:rPr sz="1400"/>
+              <a:rPr sz="1400">
+                <a:latin typeface="Calibri"/>
+              </a:rPr>
               <a:t>the impact.</a:t>
             </a:r>
           </a:p>
@@ -9575,6 +9756,9 @@
           <a:lstStyle/>
           <a:p>
             <a:r>
+              <a:rPr b="1">
+                <a:latin typeface="Calibri"/>
+              </a:rPr>
               <a:t>The Core Problem</a:t>
             </a:r>
           </a:p>
@@ -9596,49 +9780,65 @@
           <a:lstStyle/>
           <a:p>
             <a:r>
-              <a:rPr sz="1400"/>
+              <a:rPr sz="1400">
+                <a:latin typeface="Calibri"/>
+              </a:rPr>
               <a:t>sklearn accepts only numerical matrices</a:t>
             </a:r>
           </a:p>
           <a:p>
             <a:r>
-              <a:rPr sz="1400"/>
+              <a:rPr sz="1400">
+                <a:latin typeface="Calibri"/>
+              </a:rPr>
               <a:t>  No strings, no timestamps, no IPs</a:t>
             </a:r>
           </a:p>
           <a:p>
             <a:r>
-              <a:rPr sz="1400"/>
+              <a:rPr sz="1400">
+                <a:latin typeface="Calibri"/>
+              </a:rPr>
               <a:t/>
             </a:r>
           </a:p>
           <a:p>
             <a:r>
-              <a:rPr sz="1400"/>
+              <a:rPr sz="1400">
+                <a:latin typeface="Calibri"/>
+              </a:rPr>
               <a:t>Raw log line has all the signal</a:t>
             </a:r>
           </a:p>
           <a:p>
             <a:r>
-              <a:rPr sz="1400"/>
+              <a:rPr sz="1400">
+                <a:latin typeface="Calibri"/>
+              </a:rPr>
               <a:t>  but in the wrong format</a:t>
             </a:r>
           </a:p>
           <a:p>
             <a:r>
-              <a:rPr sz="1400"/>
+              <a:rPr sz="1400">
+                <a:latin typeface="Calibri"/>
+              </a:rPr>
               <a:t/>
             </a:r>
           </a:p>
           <a:p>
             <a:r>
-              <a:rPr sz="1400"/>
+              <a:rPr sz="1400">
+                <a:latin typeface="Calibri"/>
+              </a:rPr>
               <a:t>Feature engineering is the bridge</a:t>
             </a:r>
           </a:p>
           <a:p>
             <a:r>
-              <a:rPr sz="1400"/>
+              <a:rPr sz="1400">
+                <a:latin typeface="Calibri"/>
+              </a:rPr>
               <a:t>  from raw data to model input</a:t>
             </a:r>
           </a:p>
@@ -9678,11 +9878,17 @@
           <a:lstStyle/>
           <a:p>
             <a:r>
+              <a:rPr b="1">
+                <a:latin typeface="Calibri"/>
+              </a:rPr>
               <a:t>Five Types of</a:t>
             </a:r>
           </a:p>
           <a:p>
             <a:r>
+              <a:rPr b="1">
+                <a:latin typeface="Calibri"/>
+              </a:rPr>
               <a:t>Security Features</a:t>
             </a:r>
           </a:p>
@@ -9704,6 +9910,9 @@
           <a:lstStyle/>
           <a:p>
             <a:r>
+              <a:rPr b="1">
+                <a:latin typeface="Calibri"/>
+              </a:rPr>
               <a:t>02</a:t>
             </a:r>
           </a:p>
@@ -9743,6 +9952,9 @@
           <a:lstStyle/>
           <a:p>
             <a:r>
+              <a:rPr b="1">
+                <a:latin typeface="Calibri"/>
+              </a:rPr>
               <a:t>Feature Types for Security Log Data</a:t>
             </a:r>
           </a:p>
@@ -9806,6 +10018,9 @@
           <a:lstStyle/>
           <a:p>
             <a:r>
+              <a:rPr b="1">
+                <a:latin typeface="Calibri"/>
+              </a:rPr>
               <a:t>Examples in Code</a:t>
             </a:r>
           </a:p>
@@ -9827,43 +10042,57 @@
           <a:lstStyle/>
           <a:p>
             <a:r>
-              <a:rPr sz="1400"/>
+              <a:rPr sz="1400">
+                <a:latin typeface="Calibri"/>
+              </a:rPr>
               <a:t>Time-based:</a:t>
             </a:r>
           </a:p>
           <a:p>
             <a:r>
-              <a:rPr sz="1400"/>
+              <a:rPr sz="1400">
+                <a:latin typeface="Calibri"/>
+              </a:rPr>
               <a:t>  df['hour'] = df['ts'].dt.hour</a:t>
             </a:r>
           </a:p>
           <a:p>
             <a:r>
-              <a:rPr sz="1400"/>
+              <a:rPr sz="1400">
+                <a:latin typeface="Calibri"/>
+              </a:rPr>
               <a:t>  df['after_hrs'] = hour &lt; 6 | hour &gt; 22</a:t>
             </a:r>
           </a:p>
           <a:p>
             <a:r>
-              <a:rPr sz="1400"/>
+              <a:rPr sz="1400">
+                <a:latin typeface="Calibri"/>
+              </a:rPr>
               <a:t/>
             </a:r>
           </a:p>
           <a:p>
             <a:r>
-              <a:rPr sz="1400"/>
+              <a:rPr sz="1400">
+                <a:latin typeface="Calibri"/>
+              </a:rPr>
               <a:t>Aggregation:</a:t>
             </a:r>
           </a:p>
           <a:p>
             <a:r>
-              <a:rPr sz="1400"/>
+              <a:rPr sz="1400">
+                <a:latin typeface="Calibri"/>
+              </a:rPr>
               <a:t>  df.groupby('src_ip')['dest_ip']</a:t>
             </a:r>
           </a:p>
           <a:p>
             <a:r>
-              <a:rPr sz="1400"/>
+              <a:rPr sz="1400">
+                <a:latin typeface="Calibri"/>
+              </a:rPr>
               <a:t>  .transform('nunique')</a:t>
             </a:r>
           </a:p>
@@ -9885,43 +10114,57 @@
           <a:lstStyle/>
           <a:p>
             <a:r>
-              <a:rPr sz="1400"/>
+              <a:rPr sz="1400">
+                <a:latin typeface="Calibri"/>
+              </a:rPr>
               <a:t>Ratio:</a:t>
             </a:r>
           </a:p>
           <a:p>
             <a:r>
-              <a:rPr sz="1400"/>
+              <a:rPr sz="1400">
+                <a:latin typeface="Calibri"/>
+              </a:rPr>
               <a:t>  df['bytes/s'] = bytes / duration</a:t>
             </a:r>
           </a:p>
           <a:p>
             <a:r>
-              <a:rPr sz="1400"/>
+              <a:rPr sz="1400">
+                <a:latin typeface="Calibri"/>
+              </a:rPr>
               <a:t>  df['upload_ratio'] = up / total</a:t>
             </a:r>
           </a:p>
           <a:p>
             <a:r>
-              <a:rPr sz="1400"/>
+              <a:rPr sz="1400">
+                <a:latin typeface="Calibri"/>
+              </a:rPr>
               <a:t/>
             </a:r>
           </a:p>
           <a:p>
             <a:r>
-              <a:rPr sz="1400"/>
+              <a:rPr sz="1400">
+                <a:latin typeface="Calibri"/>
+              </a:rPr>
               <a:t>Categorical:</a:t>
             </a:r>
           </a:p>
           <a:p>
             <a:r>
-              <a:rPr sz="1400"/>
+              <a:rPr sz="1400">
+                <a:latin typeface="Calibri"/>
+              </a:rPr>
               <a:t>  pd.get_dummies(df['protocol'])</a:t>
             </a:r>
           </a:p>
           <a:p>
             <a:r>
-              <a:rPr sz="1400"/>
+              <a:rPr sz="1400">
+                <a:latin typeface="Calibri"/>
+              </a:rPr>
               <a:t>  or LabelEncoder()</a:t>
             </a:r>
           </a:p>
@@ -9961,11 +10204,17 @@
           <a:lstStyle/>
           <a:p>
             <a:r>
+              <a:rPr b="1">
+                <a:latin typeface="Calibri"/>
+              </a:rPr>
               <a:t>The Feature</a:t>
             </a:r>
           </a:p>
           <a:p>
             <a:r>
+              <a:rPr b="1">
+                <a:latin typeface="Calibri"/>
+              </a:rPr>
               <a:t>Engineering Pipeline</a:t>
             </a:r>
           </a:p>
@@ -9987,6 +10236,9 @@
           <a:lstStyle/>
           <a:p>
             <a:r>
+              <a:rPr b="1">
+                <a:latin typeface="Calibri"/>
+              </a:rPr>
               <a:t>03</a:t>
             </a:r>
           </a:p>
